--- a/markdown/files/slides/lecture20_parallelprefix.pptx
+++ b/markdown/files/slides/lecture20_parallelprefix.pptx
@@ -3385,15 +3385,7 @@
           <a:p>
             <a:r>
               <a:rPr lang="en-US" dirty="0"/>
-              <a:t>CSE </a:t>
-            </a:r>
-            <a:r>
-              <a:rPr lang="en-US"/>
-              <a:t>332 Spring </a:t>
-            </a:r>
-            <a:r>
-              <a:rPr lang="en-US" dirty="0"/>
-              <a:t>2026</a:t>
+              <a:t>CSE 332 Spring 2026</a:t>
             </a:r>
             <a:br>
               <a:rPr lang="en-US" dirty="0"/>
@@ -3427,9 +3419,10 @@
           <a:lstStyle/>
           <a:p>
             <a:r>
-              <a:rPr lang="en-US" dirty="0"/>
-              <a:t>Michael Whitmeyer</a:t>
-            </a:r>
+              <a:rPr lang="en-US"/>
+              <a:t>Nathan Brunelle</a:t>
+            </a:r>
+            <a:endParaRPr lang="en-US" dirty="0"/>
           </a:p>
           <a:p>
             <a:r>
@@ -25094,7 +25087,7 @@
       </p:grpSpPr>
       <p:grpSp>
         <p:nvGrpSpPr>
-          <p:cNvPr id="78" name="Group 77">
+          <p:cNvPr id="78" name="Group 77" descr="After step 2 we have the following tree for our example input:&#10;&#10;root: range is [0,8), sum is 81, leftSum is 0&#10;&#10;left child of [0,8): range is [0,4), sum is 48, leftSum is 0 (leftSum of its parent)&#10;right child of [0,8): range is [4,8), sum is 33, leftSum is 26 (sum field of its sibling + leftSum of its parent)&#10;&#10;left child of [0,4): range is [0,2), sum is 26, leftSum is 0 (leftSum of its parent)&#10;right child of [0,4): range is [2,4), sum is 22, leftSum is 26 (sum field of its sibling + leftSum of its parent)&#10;left child of [4,8): range is [4,6), sum is 10, leftSum is 48 (leftSum of its parent)&#10;right child of [4,8): range is [6,8), sum is 23, leftSum is 58 (sum field of its sibling + leftSum of its parent)&#10;&#10;left child of [0,2): range is [0,1), sum is 10, leftSum is 0 (leftSum of its parent)&#10;right child of [0,2): range is [1,2), sum is 16, leftSum is 10 (sum field of its sibling + leftSum of its parent)&#10;left child of [2,4): range is [2,3), sum is 4, leftSum is 26 (leftSum of its parent)&#10;right child of [2,4): range is [3,4), sum is 18, leftSum is 30 (sum field of its sibling + leftSum of its parent)&#10;left child of [4,6): range is [4,5), sum is 8, leftSum is 48 (leftSum of its parent)&#10;right child of [4,6): range is [5,6), sum is 2, leftSum is 56 (sum field of its sibling + leftSum of its parent)&#10;left child of [6,8): range is [6,7), sum is 14, leftSum is 58 (leftSum of its parent)&#10;right child of [6,8): range is [7,8), sum is 9, leftSum is 72 (sum field of its sibling + leftSum of its parent)">
             <a:extLst>
               <a:ext uri="{FF2B5EF4-FFF2-40B4-BE49-F238E27FC236}">
                 <a16:creationId xmlns:a16="http://schemas.microsoft.com/office/drawing/2014/main" id="{0FB8C274-5CCA-301E-3A75-99E01DE18B10}"/>
@@ -27165,7 +27158,7 @@
       </p:sp>
       <p:grpSp>
         <p:nvGrpSpPr>
-          <p:cNvPr id="81" name="Group 80">
+          <p:cNvPr id="81" name="Group 80" descr="The input to our algorithm will be the following array of length 8:&#10;&#10;[10,16,4,18,8,2,14,9]&#10;&#10;We are also given an empty array of length 8 for our output.">
             <a:extLst>
               <a:ext uri="{FF2B5EF4-FFF2-40B4-BE49-F238E27FC236}">
                 <a16:creationId xmlns:a16="http://schemas.microsoft.com/office/drawing/2014/main" id="{6C764B31-F14D-144A-64AA-02CECD9C9599}"/>
@@ -28934,10 +28927,13 @@
       </p:sp>
       <p:grpSp>
         <p:nvGrpSpPr>
-          <p:cNvPr id="78" name="Group 77" descr="After step 2 we have the following tree for our example input:&#10;&#10;root: range is [0,8), sum is 81, leftSum is 0&#10;&#10;left child of [0,8): range is [0,4), sum is 48, leftSum is 0 (leftSum of its parent)&#10;right child of [0,8): range is [4,8), sum is 33, leftSum is 26 (sum field of its sibling + leftSum of its parent)&#10;&#10;left child of [0,4): range is [0,2), sum is 26, leftSum is 0 (leftSum of its parent)&#10;right child of [0,4): range is [2,4), sum is 22, leftSum is 26 (sum field of its sibling + leftSum of its parent)&#10;left child of [4,8): range is [4,6), sum is 10, leftSum is 48 (leftSum of its parent)&#10;right child of [4,8): range is [6,8), sum is 23, leftSum is 58 (sum field of its sibling + leftSum of its parent)&#10;&#10;left child of [0,2): range is [0,1), sum is 10, leftSum is 0 (leftSum of its parent)&#10;right child of [0,2): range is [1,2), sum is 16, leftSum is 10 (sum field of its sibling + leftSum of its parent)&#10;left child of [2,4): range is [2,3), sum is 4, leftSum is 26 (leftSum of its parent)&#10;right child of [2,4): range is [3,4), sum is 18, leftSum is 30 (sum field of its sibling + leftSum of its parent)&#10;left child of [4,6): range is [4,5), sum is 8, leftSum is 48 (leftSum of its parent)&#10;right child of [4,6): range is [5,6), sum is 2, leftSum is 56 (sum field of its sibling + leftSum of its parent)&#10;left child of [6,8): range is [6,7), sum is 14, leftSum is 58 (leftSum of its parent)&#10;right child of [6,8): range is [7,8), sum is 9, leftSum is 72 (sum field of its sibling + leftSum of its parent)">
+          <p:cNvPr id="78" name="Group 77">
             <a:extLst>
               <a:ext uri="{FF2B5EF4-FFF2-40B4-BE49-F238E27FC236}">
                 <a16:creationId xmlns:a16="http://schemas.microsoft.com/office/drawing/2014/main" id="{0FB8C274-5CCA-301E-3A75-99E01DE18B10}"/>
+              </a:ext>
+              <a:ext uri="{C183D7F6-B498-43B3-948B-1728B52AA6E4}">
+                <adec:decorative xmlns:adec="http://schemas.microsoft.com/office/drawing/2017/decorative" val="1"/>
               </a:ext>
             </a:extLst>
           </p:cNvPr>

--- a/markdown/files/slides/lecture20_parallelprefix.pptx
+++ b/markdown/files/slides/lecture20_parallelprefix.pptx
@@ -3419,10 +3419,9 @@
           <a:lstStyle/>
           <a:p>
             <a:r>
-              <a:rPr lang="en-US"/>
+              <a:rPr lang="en-US" dirty="0"/>
               <a:t>Nathan Brunelle</a:t>
             </a:r>
-            <a:endParaRPr lang="en-US" dirty="0"/>
           </a:p>
           <a:p>
             <a:r>
@@ -3531,210 +3530,6 @@
           </a:p>
         </p:txBody>
       </p:sp>
-      <p:grpSp>
-        <p:nvGrpSpPr>
-          <p:cNvPr id="18" name="Group 17" descr="For this example, the output array is [10,16,18]">
-            <a:extLst>
-              <a:ext uri="{FF2B5EF4-FFF2-40B4-BE49-F238E27FC236}">
-                <a16:creationId xmlns:a16="http://schemas.microsoft.com/office/drawing/2014/main" id="{5839C693-0E44-ED6A-DA95-E4402CE83A5F}"/>
-              </a:ext>
-            </a:extLst>
-          </p:cNvPr>
-          <p:cNvGrpSpPr/>
-          <p:nvPr/>
-        </p:nvGrpSpPr>
-        <p:grpSpPr>
-          <a:xfrm>
-            <a:off x="7231525" y="3040696"/>
-            <a:ext cx="2150304" cy="715157"/>
-            <a:chOff x="7967980" y="4321811"/>
-            <a:chExt cx="1130300" cy="375920"/>
-          </a:xfrm>
-        </p:grpSpPr>
-        <p:sp>
-          <p:nvSpPr>
-            <p:cNvPr id="19" name="Rectangle 18">
-              <a:extLst>
-                <a:ext uri="{FF2B5EF4-FFF2-40B4-BE49-F238E27FC236}">
-                  <a16:creationId xmlns:a16="http://schemas.microsoft.com/office/drawing/2014/main" id="{771FBED0-7A48-F4F3-C352-128D0DD889BB}"/>
-                </a:ext>
-              </a:extLst>
-            </p:cNvPr>
-            <p:cNvSpPr/>
-            <p:nvPr/>
-          </p:nvSpPr>
-          <p:spPr>
-            <a:xfrm>
-              <a:off x="7967980" y="4321811"/>
-              <a:ext cx="375920" cy="375920"/>
-            </a:xfrm>
-            <a:prstGeom prst="rect">
-              <a:avLst/>
-            </a:prstGeom>
-            <a:solidFill>
-              <a:schemeClr val="bg1"/>
-            </a:solidFill>
-            <a:ln w="28575">
-              <a:solidFill>
-                <a:schemeClr val="tx1"/>
-              </a:solidFill>
-            </a:ln>
-          </p:spPr>
-          <p:style>
-            <a:lnRef idx="2">
-              <a:schemeClr val="accent1">
-                <a:shade val="15000"/>
-              </a:schemeClr>
-            </a:lnRef>
-            <a:fillRef idx="1">
-              <a:schemeClr val="accent1"/>
-            </a:fillRef>
-            <a:effectRef idx="0">
-              <a:schemeClr val="accent1"/>
-            </a:effectRef>
-            <a:fontRef idx="minor">
-              <a:schemeClr val="lt1"/>
-            </a:fontRef>
-          </p:style>
-          <p:txBody>
-            <a:bodyPr rtlCol="0" anchor="ctr"/>
-            <a:lstStyle/>
-            <a:p>
-              <a:pPr algn="ctr"/>
-              <a:r>
-                <a:rPr lang="en-US" sz="2800" dirty="0">
-                  <a:solidFill>
-                    <a:schemeClr val="tx1"/>
-                  </a:solidFill>
-                </a:rPr>
-                <a:t>10</a:t>
-              </a:r>
-            </a:p>
-          </p:txBody>
-        </p:sp>
-        <p:sp>
-          <p:nvSpPr>
-            <p:cNvPr id="20" name="Rectangle 19">
-              <a:extLst>
-                <a:ext uri="{FF2B5EF4-FFF2-40B4-BE49-F238E27FC236}">
-                  <a16:creationId xmlns:a16="http://schemas.microsoft.com/office/drawing/2014/main" id="{D6BCE71F-3E67-ABF8-EE58-9E426E3E53FD}"/>
-                </a:ext>
-              </a:extLst>
-            </p:cNvPr>
-            <p:cNvSpPr/>
-            <p:nvPr/>
-          </p:nvSpPr>
-          <p:spPr>
-            <a:xfrm>
-              <a:off x="8343900" y="4321811"/>
-              <a:ext cx="375920" cy="375920"/>
-            </a:xfrm>
-            <a:prstGeom prst="rect">
-              <a:avLst/>
-            </a:prstGeom>
-            <a:solidFill>
-              <a:schemeClr val="bg1"/>
-            </a:solidFill>
-            <a:ln w="28575">
-              <a:solidFill>
-                <a:schemeClr val="tx1"/>
-              </a:solidFill>
-            </a:ln>
-          </p:spPr>
-          <p:style>
-            <a:lnRef idx="2">
-              <a:schemeClr val="accent1">
-                <a:shade val="15000"/>
-              </a:schemeClr>
-            </a:lnRef>
-            <a:fillRef idx="1">
-              <a:schemeClr val="accent1"/>
-            </a:fillRef>
-            <a:effectRef idx="0">
-              <a:schemeClr val="accent1"/>
-            </a:effectRef>
-            <a:fontRef idx="minor">
-              <a:schemeClr val="lt1"/>
-            </a:fontRef>
-          </p:style>
-          <p:txBody>
-            <a:bodyPr rtlCol="0" anchor="ctr"/>
-            <a:lstStyle/>
-            <a:p>
-              <a:pPr algn="ctr"/>
-              <a:r>
-                <a:rPr lang="en-US" sz="2800" dirty="0">
-                  <a:solidFill>
-                    <a:schemeClr val="tx1"/>
-                  </a:solidFill>
-                </a:rPr>
-                <a:t>16</a:t>
-              </a:r>
-            </a:p>
-          </p:txBody>
-        </p:sp>
-        <p:sp>
-          <p:nvSpPr>
-            <p:cNvPr id="21" name="Rectangle 20">
-              <a:extLst>
-                <a:ext uri="{FF2B5EF4-FFF2-40B4-BE49-F238E27FC236}">
-                  <a16:creationId xmlns:a16="http://schemas.microsoft.com/office/drawing/2014/main" id="{D028B4C2-CC16-63DB-126B-660A5A606DC6}"/>
-                </a:ext>
-              </a:extLst>
-            </p:cNvPr>
-            <p:cNvSpPr/>
-            <p:nvPr/>
-          </p:nvSpPr>
-          <p:spPr>
-            <a:xfrm>
-              <a:off x="8722360" y="4321811"/>
-              <a:ext cx="375920" cy="375920"/>
-            </a:xfrm>
-            <a:prstGeom prst="rect">
-              <a:avLst/>
-            </a:prstGeom>
-            <a:solidFill>
-              <a:schemeClr val="bg1"/>
-            </a:solidFill>
-            <a:ln w="28575">
-              <a:solidFill>
-                <a:schemeClr val="tx1"/>
-              </a:solidFill>
-            </a:ln>
-          </p:spPr>
-          <p:style>
-            <a:lnRef idx="2">
-              <a:schemeClr val="accent1">
-                <a:shade val="15000"/>
-              </a:schemeClr>
-            </a:lnRef>
-            <a:fillRef idx="1">
-              <a:schemeClr val="accent1"/>
-            </a:fillRef>
-            <a:effectRef idx="0">
-              <a:schemeClr val="accent1"/>
-            </a:effectRef>
-            <a:fontRef idx="minor">
-              <a:schemeClr val="lt1"/>
-            </a:fontRef>
-          </p:style>
-          <p:txBody>
-            <a:bodyPr rtlCol="0" anchor="ctr"/>
-            <a:lstStyle/>
-            <a:p>
-              <a:pPr algn="ctr"/>
-              <a:r>
-                <a:rPr lang="en-US" sz="2800" dirty="0">
-                  <a:solidFill>
-                    <a:schemeClr val="tx1"/>
-                  </a:solidFill>
-                </a:rPr>
-                <a:t>18</a:t>
-              </a:r>
-            </a:p>
-          </p:txBody>
-        </p:sp>
-      </p:grpSp>
       <p:grpSp>
         <p:nvGrpSpPr>
           <p:cNvPr id="13" name="Group 12" descr="We begin with an array and a boolean function. &#10;&#10;array: [10,16,4,18, 8, 2]&#10;function: return whether x&gt;0&#10;">
@@ -4320,6 +4115,210 @@
           </a:p>
         </p:txBody>
       </p:sp>
+      <p:grpSp>
+        <p:nvGrpSpPr>
+          <p:cNvPr id="18" name="Group 17" descr="For this example, the output array is [10,16,18]">
+            <a:extLst>
+              <a:ext uri="{FF2B5EF4-FFF2-40B4-BE49-F238E27FC236}">
+                <a16:creationId xmlns:a16="http://schemas.microsoft.com/office/drawing/2014/main" id="{5839C693-0E44-ED6A-DA95-E4402CE83A5F}"/>
+              </a:ext>
+            </a:extLst>
+          </p:cNvPr>
+          <p:cNvGrpSpPr/>
+          <p:nvPr/>
+        </p:nvGrpSpPr>
+        <p:grpSpPr>
+          <a:xfrm>
+            <a:off x="7231525" y="3040696"/>
+            <a:ext cx="2150304" cy="715157"/>
+            <a:chOff x="7967980" y="4321811"/>
+            <a:chExt cx="1130300" cy="375920"/>
+          </a:xfrm>
+        </p:grpSpPr>
+        <p:sp>
+          <p:nvSpPr>
+            <p:cNvPr id="19" name="Rectangle 18">
+              <a:extLst>
+                <a:ext uri="{FF2B5EF4-FFF2-40B4-BE49-F238E27FC236}">
+                  <a16:creationId xmlns:a16="http://schemas.microsoft.com/office/drawing/2014/main" id="{771FBED0-7A48-F4F3-C352-128D0DD889BB}"/>
+                </a:ext>
+              </a:extLst>
+            </p:cNvPr>
+            <p:cNvSpPr/>
+            <p:nvPr/>
+          </p:nvSpPr>
+          <p:spPr>
+            <a:xfrm>
+              <a:off x="7967980" y="4321811"/>
+              <a:ext cx="375920" cy="375920"/>
+            </a:xfrm>
+            <a:prstGeom prst="rect">
+              <a:avLst/>
+            </a:prstGeom>
+            <a:solidFill>
+              <a:schemeClr val="bg1"/>
+            </a:solidFill>
+            <a:ln w="28575">
+              <a:solidFill>
+                <a:schemeClr val="tx1"/>
+              </a:solidFill>
+            </a:ln>
+          </p:spPr>
+          <p:style>
+            <a:lnRef idx="2">
+              <a:schemeClr val="accent1">
+                <a:shade val="15000"/>
+              </a:schemeClr>
+            </a:lnRef>
+            <a:fillRef idx="1">
+              <a:schemeClr val="accent1"/>
+            </a:fillRef>
+            <a:effectRef idx="0">
+              <a:schemeClr val="accent1"/>
+            </a:effectRef>
+            <a:fontRef idx="minor">
+              <a:schemeClr val="lt1"/>
+            </a:fontRef>
+          </p:style>
+          <p:txBody>
+            <a:bodyPr rtlCol="0" anchor="ctr"/>
+            <a:lstStyle/>
+            <a:p>
+              <a:pPr algn="ctr"/>
+              <a:r>
+                <a:rPr lang="en-US" sz="2800" dirty="0">
+                  <a:solidFill>
+                    <a:schemeClr val="tx1"/>
+                  </a:solidFill>
+                </a:rPr>
+                <a:t>10</a:t>
+              </a:r>
+            </a:p>
+          </p:txBody>
+        </p:sp>
+        <p:sp>
+          <p:nvSpPr>
+            <p:cNvPr id="20" name="Rectangle 19">
+              <a:extLst>
+                <a:ext uri="{FF2B5EF4-FFF2-40B4-BE49-F238E27FC236}">
+                  <a16:creationId xmlns:a16="http://schemas.microsoft.com/office/drawing/2014/main" id="{D6BCE71F-3E67-ABF8-EE58-9E426E3E53FD}"/>
+                </a:ext>
+              </a:extLst>
+            </p:cNvPr>
+            <p:cNvSpPr/>
+            <p:nvPr/>
+          </p:nvSpPr>
+          <p:spPr>
+            <a:xfrm>
+              <a:off x="8343900" y="4321811"/>
+              <a:ext cx="375920" cy="375920"/>
+            </a:xfrm>
+            <a:prstGeom prst="rect">
+              <a:avLst/>
+            </a:prstGeom>
+            <a:solidFill>
+              <a:schemeClr val="bg1"/>
+            </a:solidFill>
+            <a:ln w="28575">
+              <a:solidFill>
+                <a:schemeClr val="tx1"/>
+              </a:solidFill>
+            </a:ln>
+          </p:spPr>
+          <p:style>
+            <a:lnRef idx="2">
+              <a:schemeClr val="accent1">
+                <a:shade val="15000"/>
+              </a:schemeClr>
+            </a:lnRef>
+            <a:fillRef idx="1">
+              <a:schemeClr val="accent1"/>
+            </a:fillRef>
+            <a:effectRef idx="0">
+              <a:schemeClr val="accent1"/>
+            </a:effectRef>
+            <a:fontRef idx="minor">
+              <a:schemeClr val="lt1"/>
+            </a:fontRef>
+          </p:style>
+          <p:txBody>
+            <a:bodyPr rtlCol="0" anchor="ctr"/>
+            <a:lstStyle/>
+            <a:p>
+              <a:pPr algn="ctr"/>
+              <a:r>
+                <a:rPr lang="en-US" sz="2800" dirty="0">
+                  <a:solidFill>
+                    <a:schemeClr val="tx1"/>
+                  </a:solidFill>
+                </a:rPr>
+                <a:t>16</a:t>
+              </a:r>
+            </a:p>
+          </p:txBody>
+        </p:sp>
+        <p:sp>
+          <p:nvSpPr>
+            <p:cNvPr id="21" name="Rectangle 20">
+              <a:extLst>
+                <a:ext uri="{FF2B5EF4-FFF2-40B4-BE49-F238E27FC236}">
+                  <a16:creationId xmlns:a16="http://schemas.microsoft.com/office/drawing/2014/main" id="{D028B4C2-CC16-63DB-126B-660A5A606DC6}"/>
+                </a:ext>
+              </a:extLst>
+            </p:cNvPr>
+            <p:cNvSpPr/>
+            <p:nvPr/>
+          </p:nvSpPr>
+          <p:spPr>
+            <a:xfrm>
+              <a:off x="8722360" y="4321811"/>
+              <a:ext cx="375920" cy="375920"/>
+            </a:xfrm>
+            <a:prstGeom prst="rect">
+              <a:avLst/>
+            </a:prstGeom>
+            <a:solidFill>
+              <a:schemeClr val="bg1"/>
+            </a:solidFill>
+            <a:ln w="28575">
+              <a:solidFill>
+                <a:schemeClr val="tx1"/>
+              </a:solidFill>
+            </a:ln>
+          </p:spPr>
+          <p:style>
+            <a:lnRef idx="2">
+              <a:schemeClr val="accent1">
+                <a:shade val="15000"/>
+              </a:schemeClr>
+            </a:lnRef>
+            <a:fillRef idx="1">
+              <a:schemeClr val="accent1"/>
+            </a:fillRef>
+            <a:effectRef idx="0">
+              <a:schemeClr val="accent1"/>
+            </a:effectRef>
+            <a:fontRef idx="minor">
+              <a:schemeClr val="lt1"/>
+            </a:fontRef>
+          </p:style>
+          <p:txBody>
+            <a:bodyPr rtlCol="0" anchor="ctr"/>
+            <a:lstStyle/>
+            <a:p>
+              <a:pPr algn="ctr"/>
+              <a:r>
+                <a:rPr lang="en-US" sz="2800" dirty="0">
+                  <a:solidFill>
+                    <a:schemeClr val="tx1"/>
+                  </a:solidFill>
+                </a:rPr>
+                <a:t>18</a:t>
+              </a:r>
+            </a:p>
+          </p:txBody>
+        </p:sp>
+      </p:grpSp>
       <p:sp>
         <p:nvSpPr>
           <p:cNvPr id="11" name="TextBox 10">
@@ -10084,6 +10083,46 @@
       </p:grpSpPr>
       <p:sp>
         <p:nvSpPr>
+          <p:cNvPr id="51" name="Title 1">
+            <a:extLst>
+              <a:ext uri="{FF2B5EF4-FFF2-40B4-BE49-F238E27FC236}">
+                <a16:creationId xmlns:a16="http://schemas.microsoft.com/office/drawing/2014/main" id="{F886BB5E-265E-CE70-0671-67B27F1DC8E7}"/>
+              </a:ext>
+            </a:extLst>
+          </p:cNvPr>
+          <p:cNvSpPr>
+            <a:spLocks noGrp="1"/>
+          </p:cNvSpPr>
+          <p:nvPr>
+            <p:ph type="title"/>
+          </p:nvPr>
+        </p:nvSpPr>
+        <p:spPr>
+          <a:xfrm>
+            <a:off x="44967" y="-612"/>
+            <a:ext cx="10515600" cy="1325563"/>
+          </a:xfrm>
+        </p:spPr>
+        <p:txBody>
+          <a:bodyPr/>
+          <a:lstStyle/>
+          <a:p>
+            <a:r>
+              <a:rPr lang="en-US" dirty="0"/>
+              <a:t>Step 1: Create a Tree,</a:t>
+            </a:r>
+            <a:br>
+              <a:rPr lang="en-US" dirty="0"/>
+            </a:br>
+            <a:r>
+              <a:rPr lang="en-US" dirty="0"/>
+              <a:t>		Fill in sum</a:t>
+            </a:r>
+          </a:p>
+        </p:txBody>
+      </p:sp>
+      <p:sp>
+        <p:nvSpPr>
           <p:cNvPr id="3" name="Content Placeholder 2"/>
           <p:cNvSpPr>
             <a:spLocks noGrp="1"/>
@@ -10222,35 +10261,6 @@
               <a:rPr lang="en-US" dirty="0"/>
               <a:t>Create parent node, connect to children, fill in sum</a:t>
             </a:r>
-          </a:p>
-        </p:txBody>
-      </p:sp>
-      <p:sp>
-        <p:nvSpPr>
-          <p:cNvPr id="224" name="Slide Number Placeholder 223">
-            <a:extLst>
-              <a:ext uri="{FF2B5EF4-FFF2-40B4-BE49-F238E27FC236}">
-                <a16:creationId xmlns:a16="http://schemas.microsoft.com/office/drawing/2014/main" id="{EFCFBE45-A1F3-4932-85FA-AF898B9364C6}"/>
-              </a:ext>
-            </a:extLst>
-          </p:cNvPr>
-          <p:cNvSpPr>
-            <a:spLocks noGrp="1"/>
-          </p:cNvSpPr>
-          <p:nvPr>
-            <p:ph type="sldNum" sz="quarter" idx="12"/>
-          </p:nvPr>
-        </p:nvSpPr>
-        <p:spPr/>
-        <p:txBody>
-          <a:bodyPr/>
-          <a:lstStyle/>
-          <a:p>
-            <a:fld id="{F4E8603E-186F-4CC7-B8E2-5FD613D3E28C}" type="slidenum">
-              <a:rPr lang="en-US" smtClean="0"/>
-              <a:t>14</a:t>
-            </a:fld>
-            <a:endParaRPr lang="en-US" dirty="0"/>
           </a:p>
         </p:txBody>
       </p:sp>
@@ -12070,46 +12080,6 @@
           </p:style>
         </p:cxnSp>
       </p:grpSp>
-      <p:sp>
-        <p:nvSpPr>
-          <p:cNvPr id="51" name="Title 1">
-            <a:extLst>
-              <a:ext uri="{FF2B5EF4-FFF2-40B4-BE49-F238E27FC236}">
-                <a16:creationId xmlns:a16="http://schemas.microsoft.com/office/drawing/2014/main" id="{F886BB5E-265E-CE70-0671-67B27F1DC8E7}"/>
-              </a:ext>
-            </a:extLst>
-          </p:cNvPr>
-          <p:cNvSpPr>
-            <a:spLocks noGrp="1"/>
-          </p:cNvSpPr>
-          <p:nvPr>
-            <p:ph type="title"/>
-          </p:nvPr>
-        </p:nvSpPr>
-        <p:spPr>
-          <a:xfrm>
-            <a:off x="44967" y="-612"/>
-            <a:ext cx="10515600" cy="1325563"/>
-          </a:xfrm>
-        </p:spPr>
-        <p:txBody>
-          <a:bodyPr/>
-          <a:lstStyle/>
-          <a:p>
-            <a:r>
-              <a:rPr lang="en-US" dirty="0"/>
-              <a:t>Step 1: Create a Tree,</a:t>
-            </a:r>
-            <a:br>
-              <a:rPr lang="en-US" dirty="0"/>
-            </a:br>
-            <a:r>
-              <a:rPr lang="en-US" dirty="0"/>
-              <a:t>		Fill in sum</a:t>
-            </a:r>
-          </a:p>
-        </p:txBody>
-      </p:sp>
     </p:spTree>
     <p:extLst>
       <p:ext uri="{BB962C8B-B14F-4D97-AF65-F5344CB8AC3E}">
@@ -13117,6 +13087,39 @@
       </p:grpSpPr>
       <p:sp>
         <p:nvSpPr>
+          <p:cNvPr id="2" name="Title 1">
+            <a:extLst>
+              <a:ext uri="{FF2B5EF4-FFF2-40B4-BE49-F238E27FC236}">
+                <a16:creationId xmlns:a16="http://schemas.microsoft.com/office/drawing/2014/main" id="{1B74FC69-0495-2BE1-DC22-5227366F2015}"/>
+              </a:ext>
+            </a:extLst>
+          </p:cNvPr>
+          <p:cNvSpPr>
+            <a:spLocks noGrp="1"/>
+          </p:cNvSpPr>
+          <p:nvPr>
+            <p:ph type="title"/>
+          </p:nvPr>
+        </p:nvSpPr>
+        <p:spPr>
+          <a:xfrm>
+            <a:off x="0" y="147320"/>
+            <a:ext cx="4480098" cy="1325563"/>
+          </a:xfrm>
+        </p:spPr>
+        <p:txBody>
+          <a:bodyPr/>
+          <a:lstStyle/>
+          <a:p>
+            <a:r>
+              <a:rPr lang="en-US" dirty="0"/>
+              <a:t>Step 1 Java Code</a:t>
+            </a:r>
+          </a:p>
+        </p:txBody>
+      </p:sp>
+      <p:sp>
+        <p:nvSpPr>
           <p:cNvPr id="3" name="Content Placeholder 2">
             <a:extLst>
               <a:ext uri="{FF2B5EF4-FFF2-40B4-BE49-F238E27FC236}">
@@ -13658,39 +13661,6 @@
             <a:r>
               <a:rPr lang="en-US" dirty="0"/>
               <a:t>} </a:t>
-            </a:r>
-          </a:p>
-        </p:txBody>
-      </p:sp>
-      <p:sp>
-        <p:nvSpPr>
-          <p:cNvPr id="2" name="Title 1">
-            <a:extLst>
-              <a:ext uri="{FF2B5EF4-FFF2-40B4-BE49-F238E27FC236}">
-                <a16:creationId xmlns:a16="http://schemas.microsoft.com/office/drawing/2014/main" id="{1B74FC69-0495-2BE1-DC22-5227366F2015}"/>
-              </a:ext>
-            </a:extLst>
-          </p:cNvPr>
-          <p:cNvSpPr>
-            <a:spLocks noGrp="1"/>
-          </p:cNvSpPr>
-          <p:nvPr>
-            <p:ph type="title"/>
-          </p:nvPr>
-        </p:nvSpPr>
-        <p:spPr>
-          <a:xfrm>
-            <a:off x="0" y="147320"/>
-            <a:ext cx="4480098" cy="1325563"/>
-          </a:xfrm>
-        </p:spPr>
-        <p:txBody>
-          <a:bodyPr/>
-          <a:lstStyle/>
-          <a:p>
-            <a:r>
-              <a:rPr lang="en-US" dirty="0"/>
-              <a:t>Step 1 Java Code</a:t>
             </a:r>
           </a:p>
         </p:txBody>
@@ -24875,9 +24845,11 @@
             </a:extLst>
           </p:cNvPr>
           <p:cNvSpPr txBox="1">
-            <a:spLocks/>
+            <a:spLocks noGrp="1"/>
           </p:cNvSpPr>
-          <p:nvPr/>
+          <p:nvPr>
+            <p:ph type="title" idx="4294967295"/>
+          </p:nvPr>
         </p:nvSpPr>
         <p:spPr>
           <a:xfrm>
@@ -24887,9 +24859,18 @@
           <a:prstGeom prst="rect">
             <a:avLst/>
           </a:prstGeom>
+          <a:noFill/>
+          <a:ln>
+            <a:noFill/>
+            <a:prstDash/>
+          </a:ln>
+          <a:effectLst/>
         </p:spPr>
         <p:txBody>
-          <a:bodyPr vert="horz" lIns="91440" tIns="45720" rIns="91440" bIns="45720" rtlCol="0" anchor="ctr">
+          <a:bodyPr rot="0" spcFirstLastPara="0" vertOverflow="overflow" horzOverflow="overflow" vert="horz" wrap="square" lIns="91440" tIns="45720" rIns="91440" bIns="45720" numCol="1" spcCol="0" rtlCol="0" fromWordArt="0" anchor="ctr" anchorCtr="0" forceAA="0" compatLnSpc="1">
+            <a:prstTxWarp prst="textNoShape">
+              <a:avLst/>
+            </a:prstTxWarp>
             <a:normAutofit/>
           </a:bodyPr>
           <a:lstStyle>
@@ -24912,23 +24893,105 @@
             </a:lvl1pPr>
           </a:lstStyle>
           <a:p>
-            <a:r>
-              <a:rPr lang="en-US" dirty="0"/>
+            <a:pPr marL="0" marR="0" lvl="0" indent="0" algn="l" defTabSz="914400" rtl="0" eaLnBrk="1" fontAlgn="auto" latinLnBrk="0" hangingPunct="1">
+              <a:lnSpc>
+                <a:spcPct val="90000"/>
+              </a:lnSpc>
+              <a:spcBef>
+                <a:spcPct val="0"/>
+              </a:spcBef>
+              <a:spcAft>
+                <a:spcPts val="0"/>
+              </a:spcAft>
+              <a:buClrTx/>
+              <a:buSzTx/>
+              <a:buFontTx/>
+              <a:buNone/>
+              <a:tabLst/>
+              <a:defRPr/>
+            </a:pPr>
+            <a:r>
+              <a:rPr kumimoji="0" lang="en-US" sz="4400" b="0" i="0" u="none" strike="noStrike" kern="1200" cap="none" spc="0" normalizeH="0" baseline="0" noProof="0" dirty="0">
+                <a:ln>
+                  <a:noFill/>
+                </a:ln>
+                <a:solidFill>
+                  <a:schemeClr val="tx1"/>
+                </a:solidFill>
+                <a:effectLst/>
+                <a:uLnTx/>
+                <a:uFillTx/>
+                <a:latin typeface="+mj-lt"/>
+                <a:ea typeface="+mj-ea"/>
+                <a:cs typeface="+mj-cs"/>
+              </a:rPr>
               <a:t>Step 2: fill in </a:t>
             </a:r>
             <a:r>
-              <a:rPr lang="en-US" dirty="0" err="1"/>
+              <a:rPr kumimoji="0" lang="en-US" sz="4400" b="0" i="0" u="none" strike="noStrike" kern="1200" cap="none" spc="0" normalizeH="0" baseline="0" noProof="0" dirty="0" err="1">
+                <a:ln>
+                  <a:noFill/>
+                </a:ln>
+                <a:solidFill>
+                  <a:schemeClr val="tx1"/>
+                </a:solidFill>
+                <a:effectLst/>
+                <a:uLnTx/>
+                <a:uFillTx/>
+                <a:latin typeface="+mj-lt"/>
+                <a:ea typeface="+mj-ea"/>
+                <a:cs typeface="+mj-cs"/>
+              </a:rPr>
               <a:t>leftSum</a:t>
             </a:r>
             <a:r>
-              <a:rPr lang="en-US" dirty="0"/>
+              <a:rPr kumimoji="0" lang="en-US" sz="4400" b="0" i="0" u="none" strike="noStrike" kern="1200" cap="none" spc="0" normalizeH="0" baseline="0" noProof="0" dirty="0">
+                <a:ln>
+                  <a:noFill/>
+                </a:ln>
+                <a:solidFill>
+                  <a:schemeClr val="tx1"/>
+                </a:solidFill>
+                <a:effectLst/>
+                <a:uLnTx/>
+                <a:uFillTx/>
+                <a:latin typeface="+mj-lt"/>
+                <a:ea typeface="+mj-ea"/>
+                <a:cs typeface="+mj-cs"/>
+              </a:rPr>
               <a:t> </a:t>
             </a:r>
             <a:br>
-              <a:rPr lang="en-US" dirty="0"/>
+              <a:rPr kumimoji="0" lang="en-US" sz="4400" b="0" i="0" u="none" strike="noStrike" kern="1200" cap="none" spc="0" normalizeH="0" baseline="0" noProof="0" dirty="0">
+                <a:ln>
+                  <a:noFill/>
+                </a:ln>
+                <a:solidFill>
+                  <a:schemeClr val="tx1"/>
+                </a:solidFill>
+                <a:effectLst/>
+                <a:uLnTx/>
+                <a:uFillTx/>
+                <a:latin typeface="+mj-lt"/>
+                <a:ea typeface="+mj-ea"/>
+                <a:cs typeface="+mj-cs"/>
+              </a:rPr>
             </a:br>
             <a:r>
-              <a:rPr lang="en-US" dirty="0"/>
+              <a:rPr kumimoji="0" lang="en-US" sz="4400" b="0" i="0" u="none" strike="noStrike" kern="1200" cap="none" spc="0" normalizeH="0" baseline="0" noProof="0" dirty="0">
+                <a:ln>
+                  <a:noFill/>
+                </a:ln>
+                <a:solidFill>
+                  <a:schemeClr val="tx1"/>
+                </a:solidFill>
+                <a:effectLst/>
+                <a:uLnTx/>
+                <a:uFillTx/>
+                <a:latin typeface="+mj-lt"/>
+                <a:ea typeface="+mj-ea"/>
+                <a:cs typeface="+mj-cs"/>
+              </a:rPr>
               <a:t>		and Output (2/4)</a:t>
             </a:r>
           </a:p>
@@ -25085,6 +25148,54 @@
           <a:chExt cx="0" cy="0"/>
         </a:xfrm>
       </p:grpSpPr>
+      <p:sp>
+        <p:nvSpPr>
+          <p:cNvPr id="6" name="Title 1">
+            <a:extLst>
+              <a:ext uri="{FF2B5EF4-FFF2-40B4-BE49-F238E27FC236}">
+                <a16:creationId xmlns:a16="http://schemas.microsoft.com/office/drawing/2014/main" id="{CA221016-9FE9-6F35-BCAC-F0D337A43B7C}"/>
+              </a:ext>
+            </a:extLst>
+          </p:cNvPr>
+          <p:cNvSpPr>
+            <a:spLocks noGrp="1"/>
+          </p:cNvSpPr>
+          <p:nvPr>
+            <p:ph type="title"/>
+          </p:nvPr>
+        </p:nvSpPr>
+        <p:spPr>
+          <a:xfrm>
+            <a:off x="838200" y="-102235"/>
+            <a:ext cx="10515600" cy="1325563"/>
+          </a:xfrm>
+        </p:spPr>
+        <p:txBody>
+          <a:bodyPr/>
+          <a:lstStyle/>
+          <a:p>
+            <a:r>
+              <a:rPr lang="en-US" dirty="0"/>
+              <a:t>Step 2: fill in </a:t>
+            </a:r>
+            <a:r>
+              <a:rPr lang="en-US" dirty="0" err="1"/>
+              <a:t>leftSum</a:t>
+            </a:r>
+            <a:r>
+              <a:rPr lang="en-US" dirty="0"/>
+              <a:t> </a:t>
+            </a:r>
+            <a:br>
+              <a:rPr lang="en-US" dirty="0"/>
+            </a:br>
+            <a:r>
+              <a:rPr lang="en-US" dirty="0"/>
+              <a:t>		and Output (3/4)</a:t>
+            </a:r>
+          </a:p>
+        </p:txBody>
+      </p:sp>
       <p:grpSp>
         <p:nvGrpSpPr>
           <p:cNvPr id="78" name="Group 77" descr="After step 2 we have the following tree for our example input:&#10;&#10;root: range is [0,8), sum is 81, leftSum is 0&#10;&#10;left child of [0,8): range is [0,4), sum is 48, leftSum is 0 (leftSum of its parent)&#10;right child of [0,8): range is [4,8), sum is 33, leftSum is 26 (sum field of its sibling + leftSum of its parent)&#10;&#10;left child of [0,4): range is [0,2), sum is 26, leftSum is 0 (leftSum of its parent)&#10;right child of [0,4): range is [2,4), sum is 22, leftSum is 26 (sum field of its sibling + leftSum of its parent)&#10;left child of [4,8): range is [4,6), sum is 10, leftSum is 48 (leftSum of its parent)&#10;right child of [4,8): range is [6,8), sum is 23, leftSum is 58 (sum field of its sibling + leftSum of its parent)&#10;&#10;left child of [0,2): range is [0,1), sum is 10, leftSum is 0 (leftSum of its parent)&#10;right child of [0,2): range is [1,2), sum is 16, leftSum is 10 (sum field of its sibling + leftSum of its parent)&#10;left child of [2,4): range is [2,3), sum is 4, leftSum is 26 (leftSum of its parent)&#10;right child of [2,4): range is [3,4), sum is 18, leftSum is 30 (sum field of its sibling + leftSum of its parent)&#10;left child of [4,6): range is [4,5), sum is 8, leftSum is 48 (leftSum of its parent)&#10;right child of [4,6): range is [5,6), sum is 2, leftSum is 56 (sum field of its sibling + leftSum of its parent)&#10;left child of [6,8): range is [6,7), sum is 14, leftSum is 58 (leftSum of its parent)&#10;right child of [6,8): range is [7,8), sum is 9, leftSum is 72 (sum field of its sibling + leftSum of its parent)">
@@ -28799,54 +28910,6 @@
           </p:sp>
         </p:grpSp>
       </p:grpSp>
-      <p:sp>
-        <p:nvSpPr>
-          <p:cNvPr id="6" name="Title 1">
-            <a:extLst>
-              <a:ext uri="{FF2B5EF4-FFF2-40B4-BE49-F238E27FC236}">
-                <a16:creationId xmlns:a16="http://schemas.microsoft.com/office/drawing/2014/main" id="{CA221016-9FE9-6F35-BCAC-F0D337A43B7C}"/>
-              </a:ext>
-            </a:extLst>
-          </p:cNvPr>
-          <p:cNvSpPr>
-            <a:spLocks noGrp="1"/>
-          </p:cNvSpPr>
-          <p:nvPr>
-            <p:ph type="title"/>
-          </p:nvPr>
-        </p:nvSpPr>
-        <p:spPr>
-          <a:xfrm>
-            <a:off x="838200" y="-102235"/>
-            <a:ext cx="10515600" cy="1325563"/>
-          </a:xfrm>
-        </p:spPr>
-        <p:txBody>
-          <a:bodyPr/>
-          <a:lstStyle/>
-          <a:p>
-            <a:r>
-              <a:rPr lang="en-US" dirty="0"/>
-              <a:t>Step 2: fill in </a:t>
-            </a:r>
-            <a:r>
-              <a:rPr lang="en-US" dirty="0" err="1"/>
-              <a:t>leftSum</a:t>
-            </a:r>
-            <a:r>
-              <a:rPr lang="en-US" dirty="0"/>
-              <a:t> </a:t>
-            </a:r>
-            <a:br>
-              <a:rPr lang="en-US" dirty="0"/>
-            </a:br>
-            <a:r>
-              <a:rPr lang="en-US" dirty="0"/>
-              <a:t>		and Output (3/4)</a:t>
-            </a:r>
-          </a:p>
-        </p:txBody>
-      </p:sp>
     </p:spTree>
     <p:extLst>
       <p:ext uri="{BB962C8B-B14F-4D97-AF65-F5344CB8AC3E}">
@@ -36009,536 +36072,6 @@
       </p:sp>
       <p:grpSp>
         <p:nvGrpSpPr>
-          <p:cNvPr id="37" name="Group 36" descr="After the map we have the array:&#10;[1,1,0,1,0,0,1,0]">
-            <a:extLst>
-              <a:ext uri="{FF2B5EF4-FFF2-40B4-BE49-F238E27FC236}">
-                <a16:creationId xmlns:a16="http://schemas.microsoft.com/office/drawing/2014/main" id="{FC636063-C8E2-0FEE-E5BA-C8D7D1245BA4}"/>
-              </a:ext>
-            </a:extLst>
-          </p:cNvPr>
-          <p:cNvGrpSpPr/>
-          <p:nvPr/>
-        </p:nvGrpSpPr>
-        <p:grpSpPr>
-          <a:xfrm>
-            <a:off x="2790066" y="2489180"/>
-            <a:ext cx="4499734" cy="562558"/>
-            <a:chOff x="6392545" y="364404"/>
-            <a:chExt cx="5726090" cy="715878"/>
-          </a:xfrm>
-        </p:grpSpPr>
-        <p:grpSp>
-          <p:nvGrpSpPr>
-            <p:cNvPr id="38" name="Group 37">
-              <a:extLst>
-                <a:ext uri="{FF2B5EF4-FFF2-40B4-BE49-F238E27FC236}">
-                  <a16:creationId xmlns:a16="http://schemas.microsoft.com/office/drawing/2014/main" id="{7E944905-D999-C063-48EC-AF1F06585848}"/>
-                </a:ext>
-              </a:extLst>
-            </p:cNvPr>
-            <p:cNvGrpSpPr/>
-            <p:nvPr/>
-          </p:nvGrpSpPr>
-          <p:grpSpPr>
-            <a:xfrm>
-              <a:off x="6392545" y="365125"/>
-              <a:ext cx="4295776" cy="715157"/>
-              <a:chOff x="7967980" y="4321811"/>
-              <a:chExt cx="2258060" cy="375920"/>
-            </a:xfrm>
-          </p:grpSpPr>
-          <p:sp>
-            <p:nvSpPr>
-              <p:cNvPr id="41" name="Rectangle 40">
-                <a:extLst>
-                  <a:ext uri="{FF2B5EF4-FFF2-40B4-BE49-F238E27FC236}">
-                    <a16:creationId xmlns:a16="http://schemas.microsoft.com/office/drawing/2014/main" id="{B753199B-366A-E03A-9494-6050AF54EB24}"/>
-                  </a:ext>
-                </a:extLst>
-              </p:cNvPr>
-              <p:cNvSpPr/>
-              <p:nvPr/>
-            </p:nvSpPr>
-            <p:spPr>
-              <a:xfrm>
-                <a:off x="7967980" y="4321811"/>
-                <a:ext cx="375920" cy="375920"/>
-              </a:xfrm>
-              <a:prstGeom prst="rect">
-                <a:avLst/>
-              </a:prstGeom>
-              <a:solidFill>
-                <a:schemeClr val="bg1"/>
-              </a:solidFill>
-              <a:ln w="28575">
-                <a:solidFill>
-                  <a:schemeClr val="tx1"/>
-                </a:solidFill>
-              </a:ln>
-            </p:spPr>
-            <p:style>
-              <a:lnRef idx="2">
-                <a:schemeClr val="accent1">
-                  <a:shade val="15000"/>
-                </a:schemeClr>
-              </a:lnRef>
-              <a:fillRef idx="1">
-                <a:schemeClr val="accent1"/>
-              </a:fillRef>
-              <a:effectRef idx="0">
-                <a:schemeClr val="accent1"/>
-              </a:effectRef>
-              <a:fontRef idx="minor">
-                <a:schemeClr val="lt1"/>
-              </a:fontRef>
-            </p:style>
-            <p:txBody>
-              <a:bodyPr rtlCol="0" anchor="ctr"/>
-              <a:lstStyle/>
-              <a:p>
-                <a:pPr algn="ctr"/>
-                <a:r>
-                  <a:rPr lang="en-US" sz="2800" dirty="0">
-                    <a:solidFill>
-                      <a:schemeClr val="tx1"/>
-                    </a:solidFill>
-                  </a:rPr>
-                  <a:t>1</a:t>
-                </a:r>
-              </a:p>
-            </p:txBody>
-          </p:sp>
-          <p:sp>
-            <p:nvSpPr>
-              <p:cNvPr id="42" name="Rectangle 41">
-                <a:extLst>
-                  <a:ext uri="{FF2B5EF4-FFF2-40B4-BE49-F238E27FC236}">
-                    <a16:creationId xmlns:a16="http://schemas.microsoft.com/office/drawing/2014/main" id="{8449406E-601D-43ED-682F-CCBF95341B2D}"/>
-                  </a:ext>
-                </a:extLst>
-              </p:cNvPr>
-              <p:cNvSpPr/>
-              <p:nvPr/>
-            </p:nvSpPr>
-            <p:spPr>
-              <a:xfrm>
-                <a:off x="8343900" y="4321811"/>
-                <a:ext cx="375920" cy="375920"/>
-              </a:xfrm>
-              <a:prstGeom prst="rect">
-                <a:avLst/>
-              </a:prstGeom>
-              <a:solidFill>
-                <a:schemeClr val="bg1"/>
-              </a:solidFill>
-              <a:ln w="28575">
-                <a:solidFill>
-                  <a:schemeClr val="tx1"/>
-                </a:solidFill>
-              </a:ln>
-            </p:spPr>
-            <p:style>
-              <a:lnRef idx="2">
-                <a:schemeClr val="accent1">
-                  <a:shade val="15000"/>
-                </a:schemeClr>
-              </a:lnRef>
-              <a:fillRef idx="1">
-                <a:schemeClr val="accent1"/>
-              </a:fillRef>
-              <a:effectRef idx="0">
-                <a:schemeClr val="accent1"/>
-              </a:effectRef>
-              <a:fontRef idx="minor">
-                <a:schemeClr val="lt1"/>
-              </a:fontRef>
-            </p:style>
-            <p:txBody>
-              <a:bodyPr rtlCol="0" anchor="ctr"/>
-              <a:lstStyle/>
-              <a:p>
-                <a:pPr algn="ctr"/>
-                <a:r>
-                  <a:rPr lang="en-US" sz="2800" dirty="0">
-                    <a:solidFill>
-                      <a:schemeClr val="tx1"/>
-                    </a:solidFill>
-                  </a:rPr>
-                  <a:t>1</a:t>
-                </a:r>
-              </a:p>
-            </p:txBody>
-          </p:sp>
-          <p:sp>
-            <p:nvSpPr>
-              <p:cNvPr id="43" name="Rectangle 42">
-                <a:extLst>
-                  <a:ext uri="{FF2B5EF4-FFF2-40B4-BE49-F238E27FC236}">
-                    <a16:creationId xmlns:a16="http://schemas.microsoft.com/office/drawing/2014/main" id="{51CA3E64-424B-C7BB-9788-A8C9A10B3272}"/>
-                  </a:ext>
-                </a:extLst>
-              </p:cNvPr>
-              <p:cNvSpPr/>
-              <p:nvPr/>
-            </p:nvSpPr>
-            <p:spPr>
-              <a:xfrm>
-                <a:off x="8722360" y="4321811"/>
-                <a:ext cx="375920" cy="375920"/>
-              </a:xfrm>
-              <a:prstGeom prst="rect">
-                <a:avLst/>
-              </a:prstGeom>
-              <a:solidFill>
-                <a:schemeClr val="bg1"/>
-              </a:solidFill>
-              <a:ln w="28575">
-                <a:solidFill>
-                  <a:schemeClr val="tx1"/>
-                </a:solidFill>
-              </a:ln>
-            </p:spPr>
-            <p:style>
-              <a:lnRef idx="2">
-                <a:schemeClr val="accent1">
-                  <a:shade val="15000"/>
-                </a:schemeClr>
-              </a:lnRef>
-              <a:fillRef idx="1">
-                <a:schemeClr val="accent1"/>
-              </a:fillRef>
-              <a:effectRef idx="0">
-                <a:schemeClr val="accent1"/>
-              </a:effectRef>
-              <a:fontRef idx="minor">
-                <a:schemeClr val="lt1"/>
-              </a:fontRef>
-            </p:style>
-            <p:txBody>
-              <a:bodyPr rtlCol="0" anchor="ctr"/>
-              <a:lstStyle/>
-              <a:p>
-                <a:pPr algn="ctr"/>
-                <a:r>
-                  <a:rPr lang="en-US" sz="2800" dirty="0">
-                    <a:solidFill>
-                      <a:schemeClr val="tx1"/>
-                    </a:solidFill>
-                  </a:rPr>
-                  <a:t>0</a:t>
-                </a:r>
-              </a:p>
-            </p:txBody>
-          </p:sp>
-          <p:sp>
-            <p:nvSpPr>
-              <p:cNvPr id="44" name="Rectangle 43">
-                <a:extLst>
-                  <a:ext uri="{FF2B5EF4-FFF2-40B4-BE49-F238E27FC236}">
-                    <a16:creationId xmlns:a16="http://schemas.microsoft.com/office/drawing/2014/main" id="{2D8740A2-A981-696F-F04A-3039FBCB1A07}"/>
-                  </a:ext>
-                </a:extLst>
-              </p:cNvPr>
-              <p:cNvSpPr/>
-              <p:nvPr/>
-            </p:nvSpPr>
-            <p:spPr>
-              <a:xfrm>
-                <a:off x="9098280" y="4321811"/>
-                <a:ext cx="375920" cy="375920"/>
-              </a:xfrm>
-              <a:prstGeom prst="rect">
-                <a:avLst/>
-              </a:prstGeom>
-              <a:solidFill>
-                <a:schemeClr val="bg1"/>
-              </a:solidFill>
-              <a:ln w="28575">
-                <a:solidFill>
-                  <a:schemeClr val="tx1"/>
-                </a:solidFill>
-              </a:ln>
-            </p:spPr>
-            <p:style>
-              <a:lnRef idx="2">
-                <a:schemeClr val="accent1">
-                  <a:shade val="15000"/>
-                </a:schemeClr>
-              </a:lnRef>
-              <a:fillRef idx="1">
-                <a:schemeClr val="accent1"/>
-              </a:fillRef>
-              <a:effectRef idx="0">
-                <a:schemeClr val="accent1"/>
-              </a:effectRef>
-              <a:fontRef idx="minor">
-                <a:schemeClr val="lt1"/>
-              </a:fontRef>
-            </p:style>
-            <p:txBody>
-              <a:bodyPr rtlCol="0" anchor="ctr"/>
-              <a:lstStyle/>
-              <a:p>
-                <a:pPr algn="ctr"/>
-                <a:r>
-                  <a:rPr lang="en-US" sz="2800" dirty="0">
-                    <a:solidFill>
-                      <a:schemeClr val="tx1"/>
-                    </a:solidFill>
-                  </a:rPr>
-                  <a:t>1</a:t>
-                </a:r>
-              </a:p>
-            </p:txBody>
-          </p:sp>
-          <p:sp>
-            <p:nvSpPr>
-              <p:cNvPr id="45" name="Rectangle 44">
-                <a:extLst>
-                  <a:ext uri="{FF2B5EF4-FFF2-40B4-BE49-F238E27FC236}">
-                    <a16:creationId xmlns:a16="http://schemas.microsoft.com/office/drawing/2014/main" id="{B948281F-2F4F-3A9E-34D1-5B231D29F2E5}"/>
-                  </a:ext>
-                </a:extLst>
-              </p:cNvPr>
-              <p:cNvSpPr/>
-              <p:nvPr/>
-            </p:nvSpPr>
-            <p:spPr>
-              <a:xfrm>
-                <a:off x="9474200" y="4321811"/>
-                <a:ext cx="375920" cy="375920"/>
-              </a:xfrm>
-              <a:prstGeom prst="rect">
-                <a:avLst/>
-              </a:prstGeom>
-              <a:solidFill>
-                <a:schemeClr val="bg1"/>
-              </a:solidFill>
-              <a:ln w="28575">
-                <a:solidFill>
-                  <a:schemeClr val="tx1"/>
-                </a:solidFill>
-              </a:ln>
-            </p:spPr>
-            <p:style>
-              <a:lnRef idx="2">
-                <a:schemeClr val="accent1">
-                  <a:shade val="15000"/>
-                </a:schemeClr>
-              </a:lnRef>
-              <a:fillRef idx="1">
-                <a:schemeClr val="accent1"/>
-              </a:fillRef>
-              <a:effectRef idx="0">
-                <a:schemeClr val="accent1"/>
-              </a:effectRef>
-              <a:fontRef idx="minor">
-                <a:schemeClr val="lt1"/>
-              </a:fontRef>
-            </p:style>
-            <p:txBody>
-              <a:bodyPr rtlCol="0" anchor="ctr"/>
-              <a:lstStyle/>
-              <a:p>
-                <a:pPr algn="ctr"/>
-                <a:r>
-                  <a:rPr lang="en-US" sz="2800" dirty="0">
-                    <a:solidFill>
-                      <a:schemeClr val="tx1"/>
-                    </a:solidFill>
-                  </a:rPr>
-                  <a:t>0</a:t>
-                </a:r>
-              </a:p>
-            </p:txBody>
-          </p:sp>
-          <p:sp>
-            <p:nvSpPr>
-              <p:cNvPr id="46" name="Rectangle 45">
-                <a:extLst>
-                  <a:ext uri="{FF2B5EF4-FFF2-40B4-BE49-F238E27FC236}">
-                    <a16:creationId xmlns:a16="http://schemas.microsoft.com/office/drawing/2014/main" id="{67388C34-5C52-47EB-9E19-E545EE0FC16A}"/>
-                  </a:ext>
-                </a:extLst>
-              </p:cNvPr>
-              <p:cNvSpPr/>
-              <p:nvPr/>
-            </p:nvSpPr>
-            <p:spPr>
-              <a:xfrm>
-                <a:off x="9850120" y="4321811"/>
-                <a:ext cx="375920" cy="375920"/>
-              </a:xfrm>
-              <a:prstGeom prst="rect">
-                <a:avLst/>
-              </a:prstGeom>
-              <a:solidFill>
-                <a:schemeClr val="bg1"/>
-              </a:solidFill>
-              <a:ln w="28575">
-                <a:solidFill>
-                  <a:schemeClr val="tx1"/>
-                </a:solidFill>
-              </a:ln>
-            </p:spPr>
-            <p:style>
-              <a:lnRef idx="2">
-                <a:schemeClr val="accent1">
-                  <a:shade val="15000"/>
-                </a:schemeClr>
-              </a:lnRef>
-              <a:fillRef idx="1">
-                <a:schemeClr val="accent1"/>
-              </a:fillRef>
-              <a:effectRef idx="0">
-                <a:schemeClr val="accent1"/>
-              </a:effectRef>
-              <a:fontRef idx="minor">
-                <a:schemeClr val="lt1"/>
-              </a:fontRef>
-            </p:style>
-            <p:txBody>
-              <a:bodyPr rtlCol="0" anchor="ctr"/>
-              <a:lstStyle/>
-              <a:p>
-                <a:pPr algn="ctr"/>
-                <a:r>
-                  <a:rPr lang="en-US" sz="2800" dirty="0">
-                    <a:solidFill>
-                      <a:schemeClr val="tx1"/>
-                    </a:solidFill>
-                  </a:rPr>
-                  <a:t>0</a:t>
-                </a:r>
-              </a:p>
-            </p:txBody>
-          </p:sp>
-        </p:grpSp>
-        <p:sp>
-          <p:nvSpPr>
-            <p:cNvPr id="39" name="Rectangle 38">
-              <a:extLst>
-                <a:ext uri="{FF2B5EF4-FFF2-40B4-BE49-F238E27FC236}">
-                  <a16:creationId xmlns:a16="http://schemas.microsoft.com/office/drawing/2014/main" id="{D4DDE16B-3980-F9F7-9528-0890B6C4F32A}"/>
-                </a:ext>
-              </a:extLst>
-            </p:cNvPr>
-            <p:cNvSpPr/>
-            <p:nvPr/>
-          </p:nvSpPr>
-          <p:spPr>
-            <a:xfrm>
-              <a:off x="10688320" y="364404"/>
-              <a:ext cx="715157" cy="715157"/>
-            </a:xfrm>
-            <a:prstGeom prst="rect">
-              <a:avLst/>
-            </a:prstGeom>
-            <a:solidFill>
-              <a:schemeClr val="bg1"/>
-            </a:solidFill>
-            <a:ln w="28575">
-              <a:solidFill>
-                <a:schemeClr val="tx1"/>
-              </a:solidFill>
-            </a:ln>
-          </p:spPr>
-          <p:style>
-            <a:lnRef idx="2">
-              <a:schemeClr val="accent1">
-                <a:shade val="15000"/>
-              </a:schemeClr>
-            </a:lnRef>
-            <a:fillRef idx="1">
-              <a:schemeClr val="accent1"/>
-            </a:fillRef>
-            <a:effectRef idx="0">
-              <a:schemeClr val="accent1"/>
-            </a:effectRef>
-            <a:fontRef idx="minor">
-              <a:schemeClr val="lt1"/>
-            </a:fontRef>
-          </p:style>
-          <p:txBody>
-            <a:bodyPr rtlCol="0" anchor="ctr"/>
-            <a:lstStyle/>
-            <a:p>
-              <a:pPr algn="ctr"/>
-              <a:r>
-                <a:rPr lang="en-US" sz="2800" dirty="0">
-                  <a:solidFill>
-                    <a:schemeClr val="tx1"/>
-                  </a:solidFill>
-                </a:rPr>
-                <a:t>1</a:t>
-              </a:r>
-            </a:p>
-          </p:txBody>
-        </p:sp>
-        <p:sp>
-          <p:nvSpPr>
-            <p:cNvPr id="40" name="Rectangle 39">
-              <a:extLst>
-                <a:ext uri="{FF2B5EF4-FFF2-40B4-BE49-F238E27FC236}">
-                  <a16:creationId xmlns:a16="http://schemas.microsoft.com/office/drawing/2014/main" id="{3B89AE14-AE04-CD14-A077-9419F311FA7E}"/>
-                </a:ext>
-              </a:extLst>
-            </p:cNvPr>
-            <p:cNvSpPr/>
-            <p:nvPr/>
-          </p:nvSpPr>
-          <p:spPr>
-            <a:xfrm>
-              <a:off x="11403478" y="364404"/>
-              <a:ext cx="715157" cy="715157"/>
-            </a:xfrm>
-            <a:prstGeom prst="rect">
-              <a:avLst/>
-            </a:prstGeom>
-            <a:solidFill>
-              <a:schemeClr val="bg1"/>
-            </a:solidFill>
-            <a:ln w="28575">
-              <a:solidFill>
-                <a:schemeClr val="tx1"/>
-              </a:solidFill>
-            </a:ln>
-          </p:spPr>
-          <p:style>
-            <a:lnRef idx="2">
-              <a:schemeClr val="accent1">
-                <a:shade val="15000"/>
-              </a:schemeClr>
-            </a:lnRef>
-            <a:fillRef idx="1">
-              <a:schemeClr val="accent1"/>
-            </a:fillRef>
-            <a:effectRef idx="0">
-              <a:schemeClr val="accent1"/>
-            </a:effectRef>
-            <a:fontRef idx="minor">
-              <a:schemeClr val="lt1"/>
-            </a:fontRef>
-          </p:style>
-          <p:txBody>
-            <a:bodyPr rtlCol="0" anchor="ctr"/>
-            <a:lstStyle/>
-            <a:p>
-              <a:pPr algn="ctr"/>
-              <a:r>
-                <a:rPr lang="en-US" sz="2800" dirty="0">
-                  <a:solidFill>
-                    <a:schemeClr val="tx1"/>
-                  </a:solidFill>
-                </a:rPr>
-                <a:t>0</a:t>
-              </a:r>
-            </a:p>
-          </p:txBody>
-        </p:sp>
-      </p:grpSp>
-      <p:grpSp>
-        <p:nvGrpSpPr>
           <p:cNvPr id="6" name="Group 5" descr="For this pack/filter example we have the input array [10,16,4,18,8,2,14,9] and the boolean function f(x)=x&gt;9&#10;&#10;The output array will be [10,16,18,14]">
             <a:extLst>
               <a:ext uri="{FF2B5EF4-FFF2-40B4-BE49-F238E27FC236}">
@@ -38088,6 +37621,536 @@
             </p:sp>
           </mc:Fallback>
         </mc:AlternateContent>
+      </p:grpSp>
+      <p:grpSp>
+        <p:nvGrpSpPr>
+          <p:cNvPr id="37" name="Group 36" descr="After the map we have the array:&#10;[1,1,0,1,0,0,1,0]">
+            <a:extLst>
+              <a:ext uri="{FF2B5EF4-FFF2-40B4-BE49-F238E27FC236}">
+                <a16:creationId xmlns:a16="http://schemas.microsoft.com/office/drawing/2014/main" id="{FC636063-C8E2-0FEE-E5BA-C8D7D1245BA4}"/>
+              </a:ext>
+            </a:extLst>
+          </p:cNvPr>
+          <p:cNvGrpSpPr/>
+          <p:nvPr/>
+        </p:nvGrpSpPr>
+        <p:grpSpPr>
+          <a:xfrm>
+            <a:off x="2790066" y="2489180"/>
+            <a:ext cx="4499734" cy="562558"/>
+            <a:chOff x="6392545" y="364404"/>
+            <a:chExt cx="5726090" cy="715878"/>
+          </a:xfrm>
+        </p:grpSpPr>
+        <p:grpSp>
+          <p:nvGrpSpPr>
+            <p:cNvPr id="38" name="Group 37">
+              <a:extLst>
+                <a:ext uri="{FF2B5EF4-FFF2-40B4-BE49-F238E27FC236}">
+                  <a16:creationId xmlns:a16="http://schemas.microsoft.com/office/drawing/2014/main" id="{7E944905-D999-C063-48EC-AF1F06585848}"/>
+                </a:ext>
+              </a:extLst>
+            </p:cNvPr>
+            <p:cNvGrpSpPr/>
+            <p:nvPr/>
+          </p:nvGrpSpPr>
+          <p:grpSpPr>
+            <a:xfrm>
+              <a:off x="6392545" y="365125"/>
+              <a:ext cx="4295776" cy="715157"/>
+              <a:chOff x="7967980" y="4321811"/>
+              <a:chExt cx="2258060" cy="375920"/>
+            </a:xfrm>
+          </p:grpSpPr>
+          <p:sp>
+            <p:nvSpPr>
+              <p:cNvPr id="41" name="Rectangle 40">
+                <a:extLst>
+                  <a:ext uri="{FF2B5EF4-FFF2-40B4-BE49-F238E27FC236}">
+                    <a16:creationId xmlns:a16="http://schemas.microsoft.com/office/drawing/2014/main" id="{B753199B-366A-E03A-9494-6050AF54EB24}"/>
+                  </a:ext>
+                </a:extLst>
+              </p:cNvPr>
+              <p:cNvSpPr/>
+              <p:nvPr/>
+            </p:nvSpPr>
+            <p:spPr>
+              <a:xfrm>
+                <a:off x="7967980" y="4321811"/>
+                <a:ext cx="375920" cy="375920"/>
+              </a:xfrm>
+              <a:prstGeom prst="rect">
+                <a:avLst/>
+              </a:prstGeom>
+              <a:solidFill>
+                <a:schemeClr val="bg1"/>
+              </a:solidFill>
+              <a:ln w="28575">
+                <a:solidFill>
+                  <a:schemeClr val="tx1"/>
+                </a:solidFill>
+              </a:ln>
+            </p:spPr>
+            <p:style>
+              <a:lnRef idx="2">
+                <a:schemeClr val="accent1">
+                  <a:shade val="15000"/>
+                </a:schemeClr>
+              </a:lnRef>
+              <a:fillRef idx="1">
+                <a:schemeClr val="accent1"/>
+              </a:fillRef>
+              <a:effectRef idx="0">
+                <a:schemeClr val="accent1"/>
+              </a:effectRef>
+              <a:fontRef idx="minor">
+                <a:schemeClr val="lt1"/>
+              </a:fontRef>
+            </p:style>
+            <p:txBody>
+              <a:bodyPr rtlCol="0" anchor="ctr"/>
+              <a:lstStyle/>
+              <a:p>
+                <a:pPr algn="ctr"/>
+                <a:r>
+                  <a:rPr lang="en-US" sz="2800" dirty="0">
+                    <a:solidFill>
+                      <a:schemeClr val="tx1"/>
+                    </a:solidFill>
+                  </a:rPr>
+                  <a:t>1</a:t>
+                </a:r>
+              </a:p>
+            </p:txBody>
+          </p:sp>
+          <p:sp>
+            <p:nvSpPr>
+              <p:cNvPr id="42" name="Rectangle 41">
+                <a:extLst>
+                  <a:ext uri="{FF2B5EF4-FFF2-40B4-BE49-F238E27FC236}">
+                    <a16:creationId xmlns:a16="http://schemas.microsoft.com/office/drawing/2014/main" id="{8449406E-601D-43ED-682F-CCBF95341B2D}"/>
+                  </a:ext>
+                </a:extLst>
+              </p:cNvPr>
+              <p:cNvSpPr/>
+              <p:nvPr/>
+            </p:nvSpPr>
+            <p:spPr>
+              <a:xfrm>
+                <a:off x="8343900" y="4321811"/>
+                <a:ext cx="375920" cy="375920"/>
+              </a:xfrm>
+              <a:prstGeom prst="rect">
+                <a:avLst/>
+              </a:prstGeom>
+              <a:solidFill>
+                <a:schemeClr val="bg1"/>
+              </a:solidFill>
+              <a:ln w="28575">
+                <a:solidFill>
+                  <a:schemeClr val="tx1"/>
+                </a:solidFill>
+              </a:ln>
+            </p:spPr>
+            <p:style>
+              <a:lnRef idx="2">
+                <a:schemeClr val="accent1">
+                  <a:shade val="15000"/>
+                </a:schemeClr>
+              </a:lnRef>
+              <a:fillRef idx="1">
+                <a:schemeClr val="accent1"/>
+              </a:fillRef>
+              <a:effectRef idx="0">
+                <a:schemeClr val="accent1"/>
+              </a:effectRef>
+              <a:fontRef idx="minor">
+                <a:schemeClr val="lt1"/>
+              </a:fontRef>
+            </p:style>
+            <p:txBody>
+              <a:bodyPr rtlCol="0" anchor="ctr"/>
+              <a:lstStyle/>
+              <a:p>
+                <a:pPr algn="ctr"/>
+                <a:r>
+                  <a:rPr lang="en-US" sz="2800" dirty="0">
+                    <a:solidFill>
+                      <a:schemeClr val="tx1"/>
+                    </a:solidFill>
+                  </a:rPr>
+                  <a:t>1</a:t>
+                </a:r>
+              </a:p>
+            </p:txBody>
+          </p:sp>
+          <p:sp>
+            <p:nvSpPr>
+              <p:cNvPr id="43" name="Rectangle 42">
+                <a:extLst>
+                  <a:ext uri="{FF2B5EF4-FFF2-40B4-BE49-F238E27FC236}">
+                    <a16:creationId xmlns:a16="http://schemas.microsoft.com/office/drawing/2014/main" id="{51CA3E64-424B-C7BB-9788-A8C9A10B3272}"/>
+                  </a:ext>
+                </a:extLst>
+              </p:cNvPr>
+              <p:cNvSpPr/>
+              <p:nvPr/>
+            </p:nvSpPr>
+            <p:spPr>
+              <a:xfrm>
+                <a:off x="8722360" y="4321811"/>
+                <a:ext cx="375920" cy="375920"/>
+              </a:xfrm>
+              <a:prstGeom prst="rect">
+                <a:avLst/>
+              </a:prstGeom>
+              <a:solidFill>
+                <a:schemeClr val="bg1"/>
+              </a:solidFill>
+              <a:ln w="28575">
+                <a:solidFill>
+                  <a:schemeClr val="tx1"/>
+                </a:solidFill>
+              </a:ln>
+            </p:spPr>
+            <p:style>
+              <a:lnRef idx="2">
+                <a:schemeClr val="accent1">
+                  <a:shade val="15000"/>
+                </a:schemeClr>
+              </a:lnRef>
+              <a:fillRef idx="1">
+                <a:schemeClr val="accent1"/>
+              </a:fillRef>
+              <a:effectRef idx="0">
+                <a:schemeClr val="accent1"/>
+              </a:effectRef>
+              <a:fontRef idx="minor">
+                <a:schemeClr val="lt1"/>
+              </a:fontRef>
+            </p:style>
+            <p:txBody>
+              <a:bodyPr rtlCol="0" anchor="ctr"/>
+              <a:lstStyle/>
+              <a:p>
+                <a:pPr algn="ctr"/>
+                <a:r>
+                  <a:rPr lang="en-US" sz="2800" dirty="0">
+                    <a:solidFill>
+                      <a:schemeClr val="tx1"/>
+                    </a:solidFill>
+                  </a:rPr>
+                  <a:t>0</a:t>
+                </a:r>
+              </a:p>
+            </p:txBody>
+          </p:sp>
+          <p:sp>
+            <p:nvSpPr>
+              <p:cNvPr id="44" name="Rectangle 43">
+                <a:extLst>
+                  <a:ext uri="{FF2B5EF4-FFF2-40B4-BE49-F238E27FC236}">
+                    <a16:creationId xmlns:a16="http://schemas.microsoft.com/office/drawing/2014/main" id="{2D8740A2-A981-696F-F04A-3039FBCB1A07}"/>
+                  </a:ext>
+                </a:extLst>
+              </p:cNvPr>
+              <p:cNvSpPr/>
+              <p:nvPr/>
+            </p:nvSpPr>
+            <p:spPr>
+              <a:xfrm>
+                <a:off x="9098280" y="4321811"/>
+                <a:ext cx="375920" cy="375920"/>
+              </a:xfrm>
+              <a:prstGeom prst="rect">
+                <a:avLst/>
+              </a:prstGeom>
+              <a:solidFill>
+                <a:schemeClr val="bg1"/>
+              </a:solidFill>
+              <a:ln w="28575">
+                <a:solidFill>
+                  <a:schemeClr val="tx1"/>
+                </a:solidFill>
+              </a:ln>
+            </p:spPr>
+            <p:style>
+              <a:lnRef idx="2">
+                <a:schemeClr val="accent1">
+                  <a:shade val="15000"/>
+                </a:schemeClr>
+              </a:lnRef>
+              <a:fillRef idx="1">
+                <a:schemeClr val="accent1"/>
+              </a:fillRef>
+              <a:effectRef idx="0">
+                <a:schemeClr val="accent1"/>
+              </a:effectRef>
+              <a:fontRef idx="minor">
+                <a:schemeClr val="lt1"/>
+              </a:fontRef>
+            </p:style>
+            <p:txBody>
+              <a:bodyPr rtlCol="0" anchor="ctr"/>
+              <a:lstStyle/>
+              <a:p>
+                <a:pPr algn="ctr"/>
+                <a:r>
+                  <a:rPr lang="en-US" sz="2800" dirty="0">
+                    <a:solidFill>
+                      <a:schemeClr val="tx1"/>
+                    </a:solidFill>
+                  </a:rPr>
+                  <a:t>1</a:t>
+                </a:r>
+              </a:p>
+            </p:txBody>
+          </p:sp>
+          <p:sp>
+            <p:nvSpPr>
+              <p:cNvPr id="45" name="Rectangle 44">
+                <a:extLst>
+                  <a:ext uri="{FF2B5EF4-FFF2-40B4-BE49-F238E27FC236}">
+                    <a16:creationId xmlns:a16="http://schemas.microsoft.com/office/drawing/2014/main" id="{B948281F-2F4F-3A9E-34D1-5B231D29F2E5}"/>
+                  </a:ext>
+                </a:extLst>
+              </p:cNvPr>
+              <p:cNvSpPr/>
+              <p:nvPr/>
+            </p:nvSpPr>
+            <p:spPr>
+              <a:xfrm>
+                <a:off x="9474200" y="4321811"/>
+                <a:ext cx="375920" cy="375920"/>
+              </a:xfrm>
+              <a:prstGeom prst="rect">
+                <a:avLst/>
+              </a:prstGeom>
+              <a:solidFill>
+                <a:schemeClr val="bg1"/>
+              </a:solidFill>
+              <a:ln w="28575">
+                <a:solidFill>
+                  <a:schemeClr val="tx1"/>
+                </a:solidFill>
+              </a:ln>
+            </p:spPr>
+            <p:style>
+              <a:lnRef idx="2">
+                <a:schemeClr val="accent1">
+                  <a:shade val="15000"/>
+                </a:schemeClr>
+              </a:lnRef>
+              <a:fillRef idx="1">
+                <a:schemeClr val="accent1"/>
+              </a:fillRef>
+              <a:effectRef idx="0">
+                <a:schemeClr val="accent1"/>
+              </a:effectRef>
+              <a:fontRef idx="minor">
+                <a:schemeClr val="lt1"/>
+              </a:fontRef>
+            </p:style>
+            <p:txBody>
+              <a:bodyPr rtlCol="0" anchor="ctr"/>
+              <a:lstStyle/>
+              <a:p>
+                <a:pPr algn="ctr"/>
+                <a:r>
+                  <a:rPr lang="en-US" sz="2800" dirty="0">
+                    <a:solidFill>
+                      <a:schemeClr val="tx1"/>
+                    </a:solidFill>
+                  </a:rPr>
+                  <a:t>0</a:t>
+                </a:r>
+              </a:p>
+            </p:txBody>
+          </p:sp>
+          <p:sp>
+            <p:nvSpPr>
+              <p:cNvPr id="46" name="Rectangle 45">
+                <a:extLst>
+                  <a:ext uri="{FF2B5EF4-FFF2-40B4-BE49-F238E27FC236}">
+                    <a16:creationId xmlns:a16="http://schemas.microsoft.com/office/drawing/2014/main" id="{67388C34-5C52-47EB-9E19-E545EE0FC16A}"/>
+                  </a:ext>
+                </a:extLst>
+              </p:cNvPr>
+              <p:cNvSpPr/>
+              <p:nvPr/>
+            </p:nvSpPr>
+            <p:spPr>
+              <a:xfrm>
+                <a:off x="9850120" y="4321811"/>
+                <a:ext cx="375920" cy="375920"/>
+              </a:xfrm>
+              <a:prstGeom prst="rect">
+                <a:avLst/>
+              </a:prstGeom>
+              <a:solidFill>
+                <a:schemeClr val="bg1"/>
+              </a:solidFill>
+              <a:ln w="28575">
+                <a:solidFill>
+                  <a:schemeClr val="tx1"/>
+                </a:solidFill>
+              </a:ln>
+            </p:spPr>
+            <p:style>
+              <a:lnRef idx="2">
+                <a:schemeClr val="accent1">
+                  <a:shade val="15000"/>
+                </a:schemeClr>
+              </a:lnRef>
+              <a:fillRef idx="1">
+                <a:schemeClr val="accent1"/>
+              </a:fillRef>
+              <a:effectRef idx="0">
+                <a:schemeClr val="accent1"/>
+              </a:effectRef>
+              <a:fontRef idx="minor">
+                <a:schemeClr val="lt1"/>
+              </a:fontRef>
+            </p:style>
+            <p:txBody>
+              <a:bodyPr rtlCol="0" anchor="ctr"/>
+              <a:lstStyle/>
+              <a:p>
+                <a:pPr algn="ctr"/>
+                <a:r>
+                  <a:rPr lang="en-US" sz="2800" dirty="0">
+                    <a:solidFill>
+                      <a:schemeClr val="tx1"/>
+                    </a:solidFill>
+                  </a:rPr>
+                  <a:t>0</a:t>
+                </a:r>
+              </a:p>
+            </p:txBody>
+          </p:sp>
+        </p:grpSp>
+        <p:sp>
+          <p:nvSpPr>
+            <p:cNvPr id="39" name="Rectangle 38">
+              <a:extLst>
+                <a:ext uri="{FF2B5EF4-FFF2-40B4-BE49-F238E27FC236}">
+                  <a16:creationId xmlns:a16="http://schemas.microsoft.com/office/drawing/2014/main" id="{D4DDE16B-3980-F9F7-9528-0890B6C4F32A}"/>
+                </a:ext>
+              </a:extLst>
+            </p:cNvPr>
+            <p:cNvSpPr/>
+            <p:nvPr/>
+          </p:nvSpPr>
+          <p:spPr>
+            <a:xfrm>
+              <a:off x="10688320" y="364404"/>
+              <a:ext cx="715157" cy="715157"/>
+            </a:xfrm>
+            <a:prstGeom prst="rect">
+              <a:avLst/>
+            </a:prstGeom>
+            <a:solidFill>
+              <a:schemeClr val="bg1"/>
+            </a:solidFill>
+            <a:ln w="28575">
+              <a:solidFill>
+                <a:schemeClr val="tx1"/>
+              </a:solidFill>
+            </a:ln>
+          </p:spPr>
+          <p:style>
+            <a:lnRef idx="2">
+              <a:schemeClr val="accent1">
+                <a:shade val="15000"/>
+              </a:schemeClr>
+            </a:lnRef>
+            <a:fillRef idx="1">
+              <a:schemeClr val="accent1"/>
+            </a:fillRef>
+            <a:effectRef idx="0">
+              <a:schemeClr val="accent1"/>
+            </a:effectRef>
+            <a:fontRef idx="minor">
+              <a:schemeClr val="lt1"/>
+            </a:fontRef>
+          </p:style>
+          <p:txBody>
+            <a:bodyPr rtlCol="0" anchor="ctr"/>
+            <a:lstStyle/>
+            <a:p>
+              <a:pPr algn="ctr"/>
+              <a:r>
+                <a:rPr lang="en-US" sz="2800" dirty="0">
+                  <a:solidFill>
+                    <a:schemeClr val="tx1"/>
+                  </a:solidFill>
+                </a:rPr>
+                <a:t>1</a:t>
+              </a:r>
+            </a:p>
+          </p:txBody>
+        </p:sp>
+        <p:sp>
+          <p:nvSpPr>
+            <p:cNvPr id="40" name="Rectangle 39">
+              <a:extLst>
+                <a:ext uri="{FF2B5EF4-FFF2-40B4-BE49-F238E27FC236}">
+                  <a16:creationId xmlns:a16="http://schemas.microsoft.com/office/drawing/2014/main" id="{3B89AE14-AE04-CD14-A077-9419F311FA7E}"/>
+                </a:ext>
+              </a:extLst>
+            </p:cNvPr>
+            <p:cNvSpPr/>
+            <p:nvPr/>
+          </p:nvSpPr>
+          <p:spPr>
+            <a:xfrm>
+              <a:off x="11403478" y="364404"/>
+              <a:ext cx="715157" cy="715157"/>
+            </a:xfrm>
+            <a:prstGeom prst="rect">
+              <a:avLst/>
+            </a:prstGeom>
+            <a:solidFill>
+              <a:schemeClr val="bg1"/>
+            </a:solidFill>
+            <a:ln w="28575">
+              <a:solidFill>
+                <a:schemeClr val="tx1"/>
+              </a:solidFill>
+            </a:ln>
+          </p:spPr>
+          <p:style>
+            <a:lnRef idx="2">
+              <a:schemeClr val="accent1">
+                <a:shade val="15000"/>
+              </a:schemeClr>
+            </a:lnRef>
+            <a:fillRef idx="1">
+              <a:schemeClr val="accent1"/>
+            </a:fillRef>
+            <a:effectRef idx="0">
+              <a:schemeClr val="accent1"/>
+            </a:effectRef>
+            <a:fontRef idx="minor">
+              <a:schemeClr val="lt1"/>
+            </a:fontRef>
+          </p:style>
+          <p:txBody>
+            <a:bodyPr rtlCol="0" anchor="ctr"/>
+            <a:lstStyle/>
+            <a:p>
+              <a:pPr algn="ctr"/>
+              <a:r>
+                <a:rPr lang="en-US" sz="2800" dirty="0">
+                  <a:solidFill>
+                    <a:schemeClr val="tx1"/>
+                  </a:solidFill>
+                </a:rPr>
+                <a:t>0</a:t>
+              </a:r>
+            </a:p>
+          </p:txBody>
+        </p:sp>
       </p:grpSp>
       <p:grpSp>
         <p:nvGrpSpPr>

--- a/markdown/files/slides/lecture20_parallelprefix.pptx
+++ b/markdown/files/slides/lecture20_parallelprefix.pptx
@@ -3937,8 +3937,8 @@
             </p:txBody>
           </p:sp>
         </p:grpSp>
-        <mc:AlternateContent xmlns:mc="http://schemas.openxmlformats.org/markup-compatibility/2006">
-          <mc:Choice xmlns:a14="http://schemas.microsoft.com/office/drawing/2010/main" Requires="a14">
+        <mc:AlternateContent xmlns:mc="http://schemas.openxmlformats.org/markup-compatibility/2006" xmlns:a14="http://schemas.microsoft.com/office/drawing/2010/main">
+          <mc:Choice Requires="a14">
             <p:sp>
               <p:nvSpPr>
                 <p:cNvPr id="25" name="TextBox 24">
@@ -4023,7 +4023,7 @@
               </p:txBody>
             </p:sp>
           </mc:Choice>
-          <mc:Fallback>
+          <mc:Fallback xmlns="">
             <p:sp>
               <p:nvSpPr>
                 <p:cNvPr id="25" name="TextBox 24">
@@ -34914,8 +34914,8 @@
             <a:chExt cx="9115249" cy="1525609"/>
           </a:xfrm>
         </p:grpSpPr>
-        <mc:AlternateContent xmlns:mc="http://schemas.openxmlformats.org/markup-compatibility/2006">
-          <mc:Choice xmlns:a14="http://schemas.microsoft.com/office/drawing/2010/main" Requires="a14">
+        <mc:AlternateContent xmlns:mc="http://schemas.openxmlformats.org/markup-compatibility/2006" xmlns:a14="http://schemas.microsoft.com/office/drawing/2010/main">
+          <mc:Choice Requires="a14">
             <p:sp>
               <p:nvSpPr>
                 <p:cNvPr id="25" name="TextBox 24">
@@ -35000,7 +35000,7 @@
               </p:txBody>
             </p:sp>
           </mc:Choice>
-          <mc:Fallback>
+          <mc:Fallback xmlns="">
             <p:sp>
               <p:nvSpPr>
                 <p:cNvPr id="25" name="TextBox 24">
@@ -37492,8 +37492,8 @@
             </p:sp>
           </p:grpSp>
         </p:grpSp>
-        <mc:AlternateContent xmlns:mc="http://schemas.openxmlformats.org/markup-compatibility/2006">
-          <mc:Choice xmlns:a14="http://schemas.microsoft.com/office/drawing/2010/main" Requires="a14">
+        <mc:AlternateContent xmlns:mc="http://schemas.openxmlformats.org/markup-compatibility/2006" xmlns:a14="http://schemas.microsoft.com/office/drawing/2010/main">
+          <mc:Choice Requires="a14">
             <p:sp>
               <p:nvSpPr>
                 <p:cNvPr id="47" name="TextBox 46">
@@ -37576,7 +37576,7 @@
               </p:txBody>
             </p:sp>
           </mc:Choice>
-          <mc:Fallback>
+          <mc:Fallback xmlns="">
             <p:sp>
               <p:nvSpPr>
                 <p:cNvPr id="47" name="TextBox 46">
